--- a/downloads/DCT_V1_Ch11_Slides.pptx
+++ b/downloads/DCT_V1_Ch11_Slides.pptx
@@ -130,7 +130,7 @@
   <p:extLst>
     <p:ext uri="{521415D9-36F7-43E2-AB2F-B90AF26B5E84}">
       <p14:sectionLst xmlns:p14="http://schemas.microsoft.com/office/powerpoint/2010/main">
-        <p14:section name="Opening" id="{a006bd0f-a42f-a527-1519-bb31cd0b5cc7}">
+        <p14:section name="Opening" id="{94dc076b-0775-c4be-b310-b7837bcefe4b}">
           <p14:sldIdLst>
             <p14:sldId id="256"/>
             <p14:sldId id="257"/>
@@ -138,54 +138,54 @@
             <p14:sldId id="259"/>
           </p14:sldIdLst>
         </p14:section>
-        <p14:section name="11.1 Why Performance Needs an Architecture" id="{ee0936b9-0f93-40c4-c814-538aa4908aad}">
+        <p14:section name="11.1 Why Performance Needs an Architecture" id="{4eedfd57-0a19-d4e3-50f7-d3f77d97b128}">
           <p14:sldIdLst>
             <p14:sldId id="260"/>
           </p14:sldIdLst>
         </p14:section>
-        <p14:section name="11.2 Performance Beyond Financial Metrics" id="{bccfb2cb-8343-e8ad-800b-b0df7ae4d178}">
+        <p14:section name="11.2 Performance Beyond Financial Metrics" id="{aedcc0af-2f5c-2a44-3988-7a9a0ab0d227}">
           <p14:sldIdLst>
             <p14:sldId id="261"/>
           </p14:sldIdLst>
         </p14:section>
-        <p14:section name="11.3 Dimensions of Enterprise Performance" id="{4b579222-e5b2-5848-ab66-199cde290929}">
+        <p14:section name="11.3 Dimensions of Enterprise Performance" id="{bb0220e7-ebbd-0b60-9111-359c418990b3}">
           <p14:sldIdLst>
             <p14:sldId id="262"/>
           </p14:sldIdLst>
         </p14:section>
-        <p14:section name="11.4 Indicators, Metrics, and Measurement Systems" id="{278717ba-d45a-c42e-347c-c66cdd7ce939}">
+        <p14:section name="11.4 Indicators, Metrics, and Measurement Systems" id="{687552c8-536b-da8f-9209-f2fefafa03d7}">
           <p14:sldIdLst>
             <p14:sldId id="263"/>
           </p14:sldIdLst>
         </p14:section>
-        <p14:section name="11.5 Aggregation and Weighting" id="{ff62d793-13f6-ae26-bb73-a8e03c85c1eb}">
+        <p14:section name="11.5 Aggregation and Weighting" id="{84701fb9-aefb-d221-874f-abc412370f6e}">
           <p14:sldIdLst>
             <p14:sldId id="264"/>
             <p14:sldId id="265"/>
           </p14:sldIdLst>
         </p14:section>
-        <p14:section name="11.6 Performance Dependencies" id="{87954772-963b-856d-198e-8ff5bd234018}">
+        <p14:section name="11.6 Performance Dependencies" id="{cee69df7-b221-88f0-1e1c-db813e02598b}">
           <p14:sldIdLst>
             <p14:sldId id="266"/>
             <p14:sldId id="267"/>
           </p14:sldIdLst>
         </p14:section>
-        <p14:section name="11.7 Trade-offs and the Performance Frontier" id="{f8c74ea9-3535-d28f-3d83-cf645e99d7d6}">
+        <p14:section name="11.7 Trade-offs and the Performance Frontier" id="{c7ee550f-8a15-9c0a-8a2c-5963b11bfb3b}">
           <p14:sldIdLst>
             <p14:sldId id="268"/>
           </p14:sldIdLst>
         </p14:section>
-        <p14:section name="11.8 Performance Dynamics" id="{994d9259-65ac-3d43-611f-a31e2cf05577}">
+        <p14:section name="11.8 Performance Dynamics" id="{dc386f2d-7ecd-ffcd-090a-587ee3955bb5}">
           <p14:sldIdLst>
             <p14:sldId id="269"/>
           </p14:sldIdLst>
         </p14:section>
-        <p14:section name="11.9 Consistency of Measurement Systems" id="{591dabb1-dae8-0cf0-59b3-69b469614c85}">
+        <p14:section name="11.9 Consistency of Measurement Systems" id="{1049058a-69ab-f128-64bc-a627b1a15b77}">
           <p14:sldIdLst>
             <p14:sldId id="270"/>
           </p14:sldIdLst>
         </p14:section>
-        <p14:section name="Worked Example 11.1" id="{d94a0e74-f464-3120-67e3-fd07cd39145f}">
+        <p14:section name="Worked Example 11.1" id="{9d442cd2-db2f-efd1-1282-0b351ea43525}">
           <p14:sldIdLst>
             <p14:sldId id="271"/>
             <p14:sldId id="272"/>
@@ -194,12 +194,12 @@
             <p14:sldId id="275"/>
           </p14:sldIdLst>
         </p14:section>
-        <p14:section name="AXIOM Lab 1.11" id="{ab02af08-3781-caed-04bb-0e8704b95aed}">
+        <p14:section name="AXIOM Lab 1.11" id="{53aefe64-8423-f495-a190-0ef5c84a79e6}">
           <p14:sldIdLst>
             <p14:sldId id="276"/>
           </p14:sldIdLst>
         </p14:section>
-        <p14:section name="Close" id="{f0bba696-b91d-3050-1dcf-7d3dda40a29a}">
+        <p14:section name="Close" id="{8c0f05ec-4e44-2c71-38a9-8ac188ac6a7e}">
           <p14:sldIdLst>
             <p14:sldId id="277"/>
             <p14:sldId id="278"/>

--- a/downloads/DCT_V1_Ch11_Slides.pptx
+++ b/downloads/DCT_V1_Ch11_Slides.pptx
@@ -130,7 +130,7 @@
   <p:extLst>
     <p:ext uri="{521415D9-36F7-43E2-AB2F-B90AF26B5E84}">
       <p14:sectionLst xmlns:p14="http://schemas.microsoft.com/office/powerpoint/2010/main">
-        <p14:section name="Opening" id="{94dc076b-0775-c4be-b310-b7837bcefe4b}">
+        <p14:section name="Opening" id="{a79d8969-ab66-195c-de16-5aff9efb2db9}">
           <p14:sldIdLst>
             <p14:sldId id="256"/>
             <p14:sldId id="257"/>
@@ -138,54 +138,54 @@
             <p14:sldId id="259"/>
           </p14:sldIdLst>
         </p14:section>
-        <p14:section name="11.1 Why Performance Needs an Architecture" id="{4eedfd57-0a19-d4e3-50f7-d3f77d97b128}">
+        <p14:section name="11.1 Why Performance Needs an Architecture" id="{9629ff81-5625-8b75-9bb5-d193695143d4}">
           <p14:sldIdLst>
             <p14:sldId id="260"/>
           </p14:sldIdLst>
         </p14:section>
-        <p14:section name="11.2 Performance Beyond Financial Metrics" id="{aedcc0af-2f5c-2a44-3988-7a9a0ab0d227}">
+        <p14:section name="11.2 Performance Beyond Financial Metrics" id="{a9cc0da8-e7a3-ce6f-00eb-9c6b5be694e7}">
           <p14:sldIdLst>
             <p14:sldId id="261"/>
           </p14:sldIdLst>
         </p14:section>
-        <p14:section name="11.3 Dimensions of Enterprise Performance" id="{bb0220e7-ebbd-0b60-9111-359c418990b3}">
+        <p14:section name="11.3 Dimensions of Enterprise Performance" id="{42bdc4ad-9020-090a-8e03-265619029a78}">
           <p14:sldIdLst>
             <p14:sldId id="262"/>
           </p14:sldIdLst>
         </p14:section>
-        <p14:section name="11.4 Indicators, Metrics, and Measurement Systems" id="{687552c8-536b-da8f-9209-f2fefafa03d7}">
+        <p14:section name="11.4 Indicators, Metrics, and Measurement Systems" id="{77ece8b4-9273-751e-bf08-4ef8cc16ca06}">
           <p14:sldIdLst>
             <p14:sldId id="263"/>
           </p14:sldIdLst>
         </p14:section>
-        <p14:section name="11.5 Aggregation and Weighting" id="{84701fb9-aefb-d221-874f-abc412370f6e}">
+        <p14:section name="11.5 Aggregation and Weighting" id="{3a74f4a4-f0fd-21a8-13c2-caca582cd4bb}">
           <p14:sldIdLst>
             <p14:sldId id="264"/>
             <p14:sldId id="265"/>
           </p14:sldIdLst>
         </p14:section>
-        <p14:section name="11.6 Performance Dependencies" id="{cee69df7-b221-88f0-1e1c-db813e02598b}">
+        <p14:section name="11.6 Performance Dependencies" id="{d3f39b4d-eeb5-4534-24b0-94970fae5547}">
           <p14:sldIdLst>
             <p14:sldId id="266"/>
             <p14:sldId id="267"/>
           </p14:sldIdLst>
         </p14:section>
-        <p14:section name="11.7 Trade-offs and the Performance Frontier" id="{c7ee550f-8a15-9c0a-8a2c-5963b11bfb3b}">
+        <p14:section name="11.7 Trade-offs and the Performance Frontier" id="{34946f64-0615-241b-d69c-df8d6320c44b}">
           <p14:sldIdLst>
             <p14:sldId id="268"/>
           </p14:sldIdLst>
         </p14:section>
-        <p14:section name="11.8 Performance Dynamics" id="{dc386f2d-7ecd-ffcd-090a-587ee3955bb5}">
+        <p14:section name="11.8 Performance Dynamics" id="{35f76af3-7091-a307-e698-44b6a9b2806c}">
           <p14:sldIdLst>
             <p14:sldId id="269"/>
           </p14:sldIdLst>
         </p14:section>
-        <p14:section name="11.9 Consistency of Measurement Systems" id="{1049058a-69ab-f128-64bc-a627b1a15b77}">
+        <p14:section name="11.9 Consistency of Measurement Systems" id="{f5c4ef63-59de-1a63-01cf-f0da1a3b3b80}">
           <p14:sldIdLst>
             <p14:sldId id="270"/>
           </p14:sldIdLst>
         </p14:section>
-        <p14:section name="Worked Example 11.1" id="{9d442cd2-db2f-efd1-1282-0b351ea43525}">
+        <p14:section name="Worked Example 11.1" id="{3a0e2c71-4e4b-c802-fdb7-aa869abbee1d}">
           <p14:sldIdLst>
             <p14:sldId id="271"/>
             <p14:sldId id="272"/>
@@ -194,12 +194,12 @@
             <p14:sldId id="275"/>
           </p14:sldIdLst>
         </p14:section>
-        <p14:section name="AXIOM Lab 1.11" id="{53aefe64-8423-f495-a190-0ef5c84a79e6}">
+        <p14:section name="AXIOM Lab 1.11" id="{89e1956a-73ef-e1f2-dd91-d9fbbb4323de}">
           <p14:sldIdLst>
             <p14:sldId id="276"/>
           </p14:sldIdLst>
         </p14:section>
-        <p14:section name="Close" id="{8c0f05ec-4e44-2c71-38a9-8ac188ac6a7e}">
+        <p14:section name="Close" id="{a6f983ec-c12b-31aa-4929-61462fc12de2}">
           <p14:sldIdLst>
             <p14:sldId id="277"/>
             <p14:sldId id="278"/>
